--- a/docs/deck/attendance-forecast-roi.pptx
+++ b/docs/deck/attendance-forecast-roi.pptx
@@ -134,7 +134,7 @@
               <c:strCache>
                 <c:ptCount val="1"/>
                 <c:pt idx="0">
-                  <c:v>Mid case (±225 model, 40% capture)</c:v>
+                  <c:v>Mid case (450 MAE, 40% capture)</c:v>
                 </c:pt>
               </c:strCache>
             </c:strRef>
@@ -238,19 +238,19 @@
                   <c:v>-50</c:v>
                 </c:pt>
                 <c:pt idx="2">
-                  <c:v>-43</c:v>
+                  <c:v>-25</c:v>
                 </c:pt>
                 <c:pt idx="3">
-                  <c:v>-28</c:v>
+                  <c:v>24</c:v>
                 </c:pt>
                 <c:pt idx="4">
-                  <c:v>-14</c:v>
+                  <c:v>73</c:v>
                 </c:pt>
                 <c:pt idx="5">
-                  <c:v>1</c:v>
+                  <c:v>122</c:v>
                 </c:pt>
                 <c:pt idx="6">
-                  <c:v>15</c:v>
+                  <c:v>172</c:v>
                 </c:pt>
               </c:numCache>
             </c:numRef>
@@ -266,7 +266,7 @@
               <c:strCache>
                 <c:ptCount val="1"/>
                 <c:pt idx="0">
-                  <c:v>Upside (±200 model, 50% capture)</c:v>
+                  <c:v>Conservative (model only reaches 650 MAE, 30%)</c:v>
                 </c:pt>
               </c:strCache>
             </c:strRef>
@@ -370,19 +370,19 @@
                   <c:v>-50</c:v>
                 </c:pt>
                 <c:pt idx="2">
-                  <c:v>-38</c:v>
+                  <c:v>-41</c:v>
                 </c:pt>
                 <c:pt idx="3">
-                  <c:v>-13</c:v>
+                  <c:v>-24</c:v>
                 </c:pt>
                 <c:pt idx="4">
+                  <c:v>-6</c:v>
+                </c:pt>
+                <c:pt idx="5">
                   <c:v>12</c:v>
                 </c:pt>
-                <c:pt idx="5">
-                  <c:v>36</c:v>
-                </c:pt>
                 <c:pt idx="6">
-                  <c:v>61</c:v>
+                  <c:v>29</c:v>
                 </c:pt>
               </c:numCache>
             </c:numRef>
@@ -2355,7 +2355,7 @@
                 <a:ea typeface="Cambria" pitchFamily="34" charset="-122"/>
                 <a:cs typeface="Cambria" pitchFamily="34" charset="-120"/>
               </a:rPr>
-              <a:t>Staffing 1,500 guests on a ±400 guess.</a:t>
+              <a:t>Staffing 3,285 guests on a 947-guest miss.</a:t>
             </a:r>
             <a:endParaRPr lang="en-US" sz="3400" dirty="0"/>
           </a:p>
@@ -2682,7 +2682,7 @@
                 <a:ea typeface="Calibri" pitchFamily="34" charset="-122"/>
                 <a:cs typeface="Calibri" pitchFamily="34" charset="-120"/>
               </a:rPr>
-              <a:t>Today's forecast is a rule of thumb</a:t>
+              <a:t>Today's miss is measured, and it is large</a:t>
             </a:r>
             <a:endParaRPr lang="en-US" sz="1600" dirty="0"/>
           </a:p>
@@ -2721,7 +2721,7 @@
                 <a:ea typeface="Calibri" pitchFamily="34" charset="-122"/>
                 <a:cs typeface="Calibri" pitchFamily="34" charset="-120"/>
               </a:rPr>
-              <a:t>Attendance runs 600–6,000. Our current projections miss by roughly ±400 guests — an estimate, because nothing measures it. That gap is itself the first finding.</a:t>
+              <a:t>Against our own 10/2017–7/2026 history, current projections average a 947-guest daily miss (MAE) — a 29% error on a 3,285-guest average day.</a:t>
             </a:r>
             <a:endParaRPr lang="en-US" sz="1300" dirty="0"/>
           </a:p>
@@ -2782,7 +2782,7 @@
                 <a:ea typeface="Calibri" pitchFamily="34" charset="-122"/>
                 <a:cs typeface="Calibri" pitchFamily="34" charset="-120"/>
               </a:rPr>
-              <a:t>What a ±400-guest miss costs, daily</a:t>
+              <a:t>What a 947-guest average miss costs, daily</a:t>
             </a:r>
             <a:endParaRPr lang="en-US" sz="1300" dirty="0"/>
           </a:p>
@@ -2821,7 +2821,7 @@
                 <a:ea typeface="Calibri" pitchFamily="34" charset="-122"/>
                 <a:cs typeface="Calibri" pitchFamily="34" charset="-120"/>
               </a:rPr>
-              <a:t>±27%</a:t>
+              <a:t>±29%</a:t>
             </a:r>
             <a:endParaRPr lang="en-US" sz="5400" dirty="0"/>
           </a:p>
@@ -2860,7 +2860,7 @@
                 <a:ea typeface="Calibri" pitchFamily="34" charset="-122"/>
                 <a:cs typeface="Calibri" pitchFamily="34" charset="-120"/>
               </a:rPr>
-              <a:t>average error rate on a 1,500-guest day</a:t>
+              <a:t>average error rate — measured, not guessed</a:t>
             </a:r>
             <a:endParaRPr lang="en-US" sz="1200" dirty="0"/>
           </a:p>
@@ -2899,7 +2899,7 @@
                 <a:ea typeface="Calibri" pitchFamily="34" charset="-122"/>
                 <a:cs typeface="Calibri" pitchFamily="34" charset="-120"/>
               </a:rPr>
-              <a:t>~40 staff-hours</a:t>
+              <a:t>~95 staff-hours</a:t>
             </a:r>
             <a:endParaRPr lang="en-US" sz="2800" dirty="0"/>
           </a:p>
@@ -2938,7 +2938,7 @@
                 <a:ea typeface="Calibri" pitchFamily="34" charset="-122"/>
                 <a:cs typeface="Calibri" pitchFamily="34" charset="-120"/>
               </a:rPr>
-              <a:t>planned against the wrong number every day — roughly five 8-hour shifts (at ~10 guests served per scalable staff-hour)</a:t>
+              <a:t>planned against the wrong number every day — roughly twelve 8-hour shifts (at ~10 guests served per scalable staff-hour, our one estimated input)</a:t>
             </a:r>
             <a:endParaRPr lang="en-US" sz="1200" dirty="0"/>
           </a:p>
@@ -3101,7 +3101,7 @@
                 <a:ea typeface="Cambria" pitchFamily="34" charset="-122"/>
                 <a:cs typeface="Cambria" pitchFamily="34" charset="-120"/>
               </a:rPr>
-              <a:t>Halving the miss: ~$37k–$62k a year.</a:t>
+              <a:t>Halving the miss: ~$86k–$143k a year.</a:t>
             </a:r>
             <a:endParaRPr lang="en-US" sz="3400" dirty="0"/>
           </a:p>
@@ -3426,7 +3426,7 @@
                           <a:ea typeface="Calibri" pitchFamily="34" charset="-122"/>
                           <a:cs typeface="Calibri" pitchFamily="34" charset="-120"/>
                         </a:rPr>
-                        <a:t>1,500</a:t>
+                        <a:t>3,285</a:t>
                       </a:r>
                       <a:endParaRPr lang="en-US" sz="1150" dirty="0">
                         <a:latin typeface="Calibri" charset="0"/>
@@ -3494,7 +3494,7 @@
                           <a:ea typeface="Calibri" pitchFamily="34" charset="-122"/>
                           <a:cs typeface="Calibri" pitchFamily="34" charset="-120"/>
                         </a:rPr>
-                        <a:t>ours, from ticketing</a:t>
+                        <a:t>measured, from ticketing</a:t>
                       </a:r>
                       <a:endParaRPr lang="en-US" sz="1150" dirty="0">
                         <a:latin typeface="Calibri" charset="0"/>
@@ -3564,7 +3564,7 @@
                           <a:ea typeface="Calibri" pitchFamily="34" charset="-122"/>
                           <a:cs typeface="Calibri" pitchFamily="34" charset="-120"/>
                         </a:rPr>
-                        <a:t>Incumbent miss</a:t>
+                        <a:t>Incumbent MAE</a:t>
                       </a:r>
                       <a:endParaRPr lang="en-US" sz="1150" dirty="0">
                         <a:latin typeface="Calibri" charset="0"/>
@@ -3632,7 +3632,7 @@
                           <a:ea typeface="Calibri" pitchFamily="34" charset="-122"/>
                           <a:cs typeface="Calibri" pitchFamily="34" charset="-120"/>
                         </a:rPr>
-                        <a:t>±400 guests</a:t>
+                        <a:t>947 guests</a:t>
                       </a:r>
                       <a:endParaRPr lang="en-US" sz="1150" dirty="0">
                         <a:latin typeface="Calibri" charset="0"/>
@@ -3694,13 +3694,13 @@
                       <a:r>
                         <a:rPr lang="en-US" sz="1150" dirty="0">
                           <a:solidFill>
-                            <a:srgbClr val="D24E1E"/>
+                            <a:srgbClr val="3A2F1E"/>
                           </a:solidFill>
                           <a:latin typeface="Calibri" pitchFamily="34" charset="0"/>
                           <a:ea typeface="Calibri" pitchFamily="34" charset="-122"/>
                           <a:cs typeface="Calibri" pitchFamily="34" charset="-120"/>
                         </a:rPr>
-                        <a:t>estimate — Phase 1 measures it</a:t>
+                        <a:t>measured, 10/2017–7/2026</a:t>
                       </a:r>
                       <a:endParaRPr lang="en-US" sz="1150" dirty="0">
                         <a:latin typeface="Calibri" charset="0"/>
@@ -3770,7 +3770,7 @@
                           <a:ea typeface="Calibri" pitchFamily="34" charset="-122"/>
                           <a:cs typeface="Calibri" pitchFamily="34" charset="-120"/>
                         </a:rPr>
-                        <a:t>Model miss (target)</a:t>
+                        <a:t>Model MAE (target)</a:t>
                       </a:r>
                       <a:endParaRPr lang="en-US" sz="1150" dirty="0">
                         <a:latin typeface="Calibri" charset="0"/>
@@ -3838,7 +3838,7 @@
                           <a:ea typeface="Calibri" pitchFamily="34" charset="-122"/>
                           <a:cs typeface="Calibri" pitchFamily="34" charset="-120"/>
                         </a:rPr>
-                        <a:t>±225 guests</a:t>
+                        <a:t>450 guests</a:t>
                       </a:r>
                       <a:endParaRPr lang="en-US" sz="1150" dirty="0">
                         <a:latin typeface="Calibri" charset="0"/>
@@ -3906,7 +3906,7 @@
                           <a:ea typeface="Calibri" pitchFamily="34" charset="-122"/>
                           <a:cs typeface="Calibri" pitchFamily="34" charset="-120"/>
                         </a:rPr>
-                        <a:t>Phase 0 measures it</a:t>
+                        <a:t>target — Phase 0 validates</a:t>
                       </a:r>
                       <a:endParaRPr lang="en-US" sz="1150" dirty="0">
                         <a:latin typeface="Calibri" charset="0"/>
@@ -4106,13 +4106,13 @@
                       <a:r>
                         <a:rPr lang="en-US" sz="1150" dirty="0">
                           <a:solidFill>
-                            <a:srgbClr val="3A2F1E"/>
+                            <a:srgbClr val="D24E1E"/>
                           </a:solidFill>
                           <a:latin typeface="Calibri" pitchFamily="34" charset="0"/>
                           <a:ea typeface="Calibri" pitchFamily="34" charset="-122"/>
                           <a:cs typeface="Calibri" pitchFamily="34" charset="-120"/>
                         </a:rPr>
-                        <a:t>our labor standards</a:t>
+                        <a:t>estimate — to confirm</a:t>
                       </a:r>
                       <a:endParaRPr lang="en-US" sz="1150" dirty="0">
                         <a:latin typeface="Calibri" charset="0"/>
@@ -4250,7 +4250,7 @@
                           <a:ea typeface="Calibri" pitchFamily="34" charset="-122"/>
                           <a:cs typeface="Calibri" pitchFamily="34" charset="-120"/>
                         </a:rPr>
-                        <a:t>$22</a:t>
+                        <a:t>$18</a:t>
                       </a:r>
                       <a:endParaRPr lang="en-US" sz="1150" dirty="0">
                         <a:latin typeface="Calibri" charset="0"/>
@@ -4318,7 +4318,7 @@
                           <a:ea typeface="Calibri" pitchFamily="34" charset="-122"/>
                           <a:cs typeface="Calibri" pitchFamily="34" charset="-120"/>
                         </a:rPr>
-                        <a:t>finance</a:t>
+                        <a:t>$15 wage + ~20% load</a:t>
                       </a:r>
                       <a:endParaRPr lang="en-US" sz="1150" dirty="0">
                         <a:latin typeface="Calibri" charset="0"/>
@@ -4819,7 +4819,7 @@
                 <a:ea typeface="Calibri" pitchFamily="34" charset="-122"/>
                 <a:cs typeface="Calibri" pitchFamily="34" charset="-120"/>
               </a:rPr>
-              <a:t>175</a:t>
+              <a:t>497</a:t>
             </a:r>
             <a:endParaRPr lang="en-US" sz="2200" dirty="0"/>
           </a:p>
@@ -4858,7 +4858,7 @@
                 <a:ea typeface="Calibri" pitchFamily="34" charset="-122"/>
                 <a:cs typeface="Calibri" pitchFamily="34" charset="-120"/>
               </a:rPr>
-              <a:t>fewer mis-forecast guests per day (±400 → ±225)</a:t>
+              <a:t>fewer mis-forecast guests per day (947 → 450)</a:t>
             </a:r>
             <a:endParaRPr lang="en-US" sz="1150" dirty="0"/>
           </a:p>
@@ -4897,7 +4897,7 @@
                 <a:ea typeface="Calibri" pitchFamily="34" charset="-122"/>
                 <a:cs typeface="Calibri" pitchFamily="34" charset="-120"/>
               </a:rPr>
-              <a:t>17.5 hrs</a:t>
+              <a:t>~50 hrs</a:t>
             </a:r>
             <a:endParaRPr lang="en-US" sz="2200" dirty="0"/>
           </a:p>
@@ -4975,7 +4975,7 @@
                 <a:ea typeface="Calibri" pitchFamily="34" charset="-122"/>
                 <a:cs typeface="Calibri" pitchFamily="34" charset="-120"/>
               </a:rPr>
-              <a:t>$385 / day</a:t>
+              <a:t>$895 / day</a:t>
             </a:r>
             <a:endParaRPr lang="en-US" sz="2200" dirty="0"/>
           </a:p>
@@ -5014,7 +5014,7 @@
                 <a:ea typeface="Calibri" pitchFamily="34" charset="-122"/>
                 <a:cs typeface="Calibri" pitchFamily="34" charset="-120"/>
               </a:rPr>
-              <a:t>at the $22 loaded rate</a:t>
+              <a:t>at the $18 loaded rate</a:t>
             </a:r>
             <a:endParaRPr lang="en-US" sz="1150" dirty="0"/>
           </a:p>
@@ -5053,7 +5053,7 @@
                 <a:ea typeface="Calibri" pitchFamily="34" charset="-122"/>
                 <a:cs typeface="Calibri" pitchFamily="34" charset="-120"/>
               </a:rPr>
-              <a:t>~$123k / yr</a:t>
+              <a:t>~$286k / yr</a:t>
             </a:r>
             <a:endParaRPr lang="en-US" sz="2200" dirty="0"/>
           </a:p>
@@ -5153,7 +5153,7 @@
                 <a:ea typeface="Calibri" pitchFamily="34" charset="-122"/>
                 <a:cs typeface="Calibri" pitchFamily="34" charset="-120"/>
               </a:rPr>
-              <a:t>$37k–$62k / yr</a:t>
+              <a:t>$86k–$143k / yr</a:t>
             </a:r>
             <a:endParaRPr lang="en-US" sz="3000" dirty="0"/>
           </a:p>
@@ -5231,7 +5231,7 @@
                 <a:ea typeface="Calibri" pitchFamily="34" charset="-122"/>
                 <a:cs typeface="Calibri" pitchFamily="34" charset="-120"/>
               </a:rPr>
-              <a:t>A range, never a point: the deck's only promise is to measure. Phase 0/1 replace every estimate with our own data.</a:t>
+              <a:t>A range, never a point: the incumbent side is measured; Phase 0 validates the model side on nine seasons of our own data.</a:t>
             </a:r>
             <a:endParaRPr lang="en-US" sz="1050" dirty="0"/>
           </a:p>
@@ -5394,7 +5394,7 @@
                 <a:ea typeface="Cambria" pitchFamily="34" charset="-122"/>
                 <a:cs typeface="Cambria" pitchFamily="34" charset="-120"/>
               </a:rPr>
-              <a:t>Payback in year 2–3; year 1 is negative.</a:t>
+              <a:t>Break-even ~month 15 in the mid case.</a:t>
             </a:r>
             <a:endParaRPr lang="en-US" sz="3400" dirty="0"/>
           </a:p>
@@ -5671,7 +5671,7 @@
                 <a:ea typeface="Calibri" pitchFamily="34" charset="-122"/>
                 <a:cs typeface="Calibri" pitchFamily="34" charset="-120"/>
               </a:rPr>
-              <a:t>Break-even ~month 30</a:t>
+              <a:t>Break-even ~month 15</a:t>
             </a:r>
             <a:endParaRPr lang="en-US" sz="1400" dirty="0"/>
           </a:p>
@@ -5710,7 +5710,7 @@
                 <a:ea typeface="Calibri" pitchFamily="34" charset="-122"/>
                 <a:cs typeface="Calibri" pitchFamily="34" charset="-120"/>
               </a:rPr>
-              <a:t>mid case; ~month 21 if the incumbent really is ±400</a:t>
+              <a:t>mid case (~$114k/yr captured, net of run cost)</a:t>
             </a:r>
             <a:endParaRPr lang="en-US" sz="1050" dirty="0"/>
           </a:p>
@@ -5771,7 +5771,7 @@
                 <a:ea typeface="Calibri" pitchFamily="34" charset="-122"/>
                 <a:cs typeface="Calibri" pitchFamily="34" charset="-120"/>
               </a:rPr>
-              <a:t>Conservative case doesn't pay back</a:t>
+              <a:t>Even the conservative case pays back</a:t>
             </a:r>
             <a:endParaRPr lang="en-US" sz="1400" dirty="0"/>
           </a:p>
@@ -5810,7 +5810,7 @@
                 <a:ea typeface="Calibri" pitchFamily="34" charset="-122"/>
                 <a:cs typeface="Calibri" pitchFamily="34" charset="-120"/>
               </a:rPr>
-              <a:t>and that is what the phase gates are for — we find out for ~$8k, not $50k</a:t>
+              <a:t>~month 26 if the model only closes a third of the gap — and if it can't beat 947 at all, Phase 0 kills it for ~$8k, not $50k</a:t>
             </a:r>
             <a:endParaRPr lang="en-US" sz="1050" dirty="0"/>
           </a:p>
@@ -8261,7 +8261,7 @@
                 <a:ea typeface="Calibri" pitchFamily="34" charset="-122"/>
                 <a:cs typeface="Calibri" pitchFamily="34" charset="-120"/>
               </a:rPr>
-              <a:t>Every accuracy number so far is provisional</a:t>
+              <a:t>The model's side is provisional</a:t>
             </a:r>
             <a:endParaRPr lang="en-US" sz="1450" dirty="0"/>
           </a:p>
@@ -8300,7 +8300,7 @@
                 <a:ea typeface="Calibri" pitchFamily="34" charset="-122"/>
                 <a:cs typeface="Calibri" pitchFamily="34" charset="-120"/>
               </a:rPr>
-              <a:t>The demo runs on synthetic data; the ±400 incumbent figure is an internal estimate. Phase 0 re-measures the model and Phase 1 measures the incumbent — gates are set on those, not on this deck.</a:t>
+              <a:t>The incumbent MAE (947) is measured on our own history; the 450 target is not yet — the demo runs on synthetic data. Phase 0 validates the model on our nine seasons before gates are set.</a:t>
             </a:r>
             <a:endParaRPr lang="en-US" sz="1250" dirty="0"/>
           </a:p>
@@ -8339,7 +8339,7 @@
                 <a:ea typeface="Calibri" pitchFamily="34" charset="-122"/>
                 <a:cs typeface="Calibri" pitchFamily="34" charset="-120"/>
               </a:rPr>
-              <a:t>Year 1 is cash-negative</a:t>
+              <a:t>Year 1 is still cash-negative</a:t>
             </a:r>
             <a:endParaRPr lang="en-US" sz="1450" dirty="0"/>
           </a:p>
@@ -8378,7 +8378,7 @@
                 <a:ea typeface="Calibri" pitchFamily="34" charset="-122"/>
                 <a:cs typeface="Calibri" pitchFamily="34" charset="-120"/>
               </a:rPr>
-              <a:t>The case turns on year 2 and beyond. If shadow says the mid case is wrong, we stop at the kill point having spent engineering time only.</a:t>
+              <a:t>Benefits start ~month 9; mid-case break-even lands mid-year-2. If Phase 0 says the 450 target is fantasy, we stop at the kill point having spent engineering time only.</a:t>
             </a:r>
             <a:endParaRPr lang="en-US" sz="1250" dirty="0"/>
           </a:p>
@@ -8740,7 +8740,7 @@
                 <a:ea typeface="Calibri" pitchFamily="34" charset="-122"/>
                 <a:cs typeface="Calibri" pitchFamily="34" charset="-120"/>
               </a:rPr>
-              <a:t>One ticketing extract (2+ seasons of daily admissions) — no integrations, no vendors</a:t>
+              <a:t>One ticketing extract — 10/2017 to 7/2026, nearly nine seasons of daily admissions; no integrations, no vendors</a:t>
             </a:r>
             <a:endParaRPr lang="en-US" sz="1500" dirty="0"/>
           </a:p>

--- a/docs/deck/attendance-forecast-roi.pptx
+++ b/docs/deck/attendance-forecast-roi.pptx
@@ -2192,7 +2192,7 @@
                 <a:ea typeface="Calibri" pitchFamily="34" charset="-122"/>
                 <a:cs typeface="Calibri" pitchFamily="34" charset="-120"/>
               </a:rPr>
-              <a:t>Week-ahead attendance forecasting for staffing and ad spend — phase-gated, measured against our own incumbent before operations changes anything.</a:t>
+              <a:t>Month-ahead attendance forecasting for the labor lock, week-ahead for adjustments and ad spend — phase-gated, measured against our own incumbent before operations changes anything.</a:t>
             </a:r>
             <a:endParaRPr lang="en-US" sz="1700" dirty="0"/>
           </a:p>
@@ -2355,7 +2355,7 @@
                 <a:ea typeface="Cambria" pitchFamily="34" charset="-122"/>
                 <a:cs typeface="Cambria" pitchFamily="34" charset="-120"/>
               </a:rPr>
-              <a:t>Staffing 3,285 guests on a 947-guest miss.</a:t>
+              <a:t>Labor locks a month out — on a 947 miss.</a:t>
             </a:r>
             <a:endParaRPr lang="en-US" sz="3400" dirty="0"/>
           </a:p>
@@ -2438,7 +2438,7 @@
                 <a:ea typeface="Calibri" pitchFamily="34" charset="-122"/>
                 <a:cs typeface="Calibri" pitchFamily="34" charset="-120"/>
               </a:rPr>
-              <a:t>Schedules lock ~7 days out</a:t>
+              <a:t>Labor budgets commit ~30 days out</a:t>
             </a:r>
             <a:endParaRPr lang="en-US" sz="1600" dirty="0"/>
           </a:p>
@@ -2477,7 +2477,7 @@
                 <a:ea typeface="Calibri" pitchFamily="34" charset="-122"/>
                 <a:cs typeface="Calibri" pitchFamily="34" charset="-120"/>
               </a:rPr>
-              <a:t>Rosters for our ~300 employees are set before the week is knowable.</a:t>
+              <a:t>The zoo plans rosters and labor for ~300 employees a month ahead — so the model's headline horizon is month-ahead, matching that lock.</a:t>
             </a:r>
             <a:endParaRPr lang="en-US" sz="1300" dirty="0"/>
           </a:p>
@@ -2560,7 +2560,7 @@
                 <a:ea typeface="Calibri" pitchFamily="34" charset="-122"/>
                 <a:cs typeface="Calibri" pitchFamily="34" charset="-120"/>
               </a:rPr>
-              <a:t>Ad spend commits at the same horizon</a:t>
+              <a:t>Adjustments and ad spend at ~7 days</a:t>
             </a:r>
             <a:endParaRPr lang="en-US" sz="1600" dirty="0"/>
           </a:p>
@@ -2599,7 +2599,7 @@
                 <a:ea typeface="Calibri" pitchFamily="34" charset="-122"/>
                 <a:cs typeface="Calibri" pitchFamily="34" charset="-120"/>
               </a:rPr>
-              <a:t>Promos and media buys need soft days flagged a week early to act at all.</a:t>
+              <a:t>Weekly schedule tweaks and media buys key on a week-ahead forecast; promos need soft days flagged early enough to act.</a:t>
             </a:r>
             <a:endParaRPr lang="en-US" sz="1300" dirty="0"/>
           </a:p>
@@ -4782,6 +4782,212 @@
                   </a:tcPr>
                 </a:tc>
               </a:tr>
+              <a:tr h="310896">
+                <a:tc>
+                  <a:txBody>
+                    <a:bodyPr/>
+                    <a:lstStyle/>
+                    <a:p>
+                      <a:pPr indent="0" marL="0">
+                        <a:buNone/>
+                      </a:pPr>
+                      <a:r>
+                        <a:rPr lang="en-US" sz="1150" dirty="0">
+                          <a:solidFill>
+                            <a:srgbClr val="3A2F1E"/>
+                          </a:solidFill>
+                          <a:latin typeface="Calibri" pitchFamily="34" charset="0"/>
+                          <a:ea typeface="Calibri" pitchFamily="34" charset="-122"/>
+                          <a:cs typeface="Calibri" pitchFamily="34" charset="-120"/>
+                        </a:rPr>
+                        <a:t>Forecast horizon</a:t>
+                      </a:r>
+                      <a:endParaRPr lang="en-US" sz="1150" dirty="0">
+                        <a:latin typeface="Calibri" charset="0"/>
+                        <a:ea typeface="Calibri" charset="0"/>
+                        <a:cs typeface="Calibri" charset="0"/>
+                      </a:endParaRPr>
+                    </a:p>
+                  </a:txBody>
+                  <a:tcPr marL="54864" marR="54864" marT="54864" marB="54864" anchor="ctr">
+                    <a:lnL w="9525" cap="flat" cmpd="sng" algn="ctr">
+                      <a:solidFill>
+                        <a:srgbClr val="E6DCC2"/>
+                      </a:solidFill>
+                      <a:prstDash val="solid"/>
+                      <a:round/>
+                      <a:headEnd type="none" w="med" len="med"/>
+                      <a:tailEnd type="none" w="med" len="med"/>
+                    </a:lnL>
+                    <a:lnR w="9525" cap="flat" cmpd="sng" algn="ctr">
+                      <a:solidFill>
+                        <a:srgbClr val="E6DCC2"/>
+                      </a:solidFill>
+                      <a:prstDash val="solid"/>
+                      <a:round/>
+                      <a:headEnd type="none" w="med" len="med"/>
+                      <a:tailEnd type="none" w="med" len="med"/>
+                    </a:lnR>
+                    <a:lnT w="9525" cap="flat" cmpd="sng" algn="ctr">
+                      <a:solidFill>
+                        <a:srgbClr val="E6DCC2"/>
+                      </a:solidFill>
+                      <a:prstDash val="solid"/>
+                      <a:round/>
+                      <a:headEnd type="none" w="med" len="med"/>
+                      <a:tailEnd type="none" w="med" len="med"/>
+                    </a:lnT>
+                    <a:lnB w="9525" cap="flat" cmpd="sng" algn="ctr">
+                      <a:solidFill>
+                        <a:srgbClr val="E6DCC2"/>
+                      </a:solidFill>
+                      <a:prstDash val="solid"/>
+                      <a:round/>
+                      <a:headEnd type="none" w="med" len="med"/>
+                      <a:tailEnd type="none" w="med" len="med"/>
+                    </a:lnB>
+                    <a:solidFill>
+                      <a:srgbClr val="FFFFFF"/>
+                    </a:solidFill>
+                  </a:tcPr>
+                </a:tc>
+                <a:tc>
+                  <a:txBody>
+                    <a:bodyPr/>
+                    <a:lstStyle/>
+                    <a:p>
+                      <a:pPr indent="0" marL="0">
+                        <a:buNone/>
+                      </a:pPr>
+                      <a:r>
+                        <a:rPr lang="en-US" sz="1150" dirty="0">
+                          <a:solidFill>
+                            <a:srgbClr val="3A2F1E"/>
+                          </a:solidFill>
+                          <a:latin typeface="Calibri" pitchFamily="34" charset="0"/>
+                          <a:ea typeface="Calibri" pitchFamily="34" charset="-122"/>
+                          <a:cs typeface="Calibri" pitchFamily="34" charset="-120"/>
+                        </a:rPr>
+                        <a:t>month-ahead</a:t>
+                      </a:r>
+                      <a:endParaRPr lang="en-US" sz="1150" dirty="0">
+                        <a:latin typeface="Calibri" charset="0"/>
+                        <a:ea typeface="Calibri" charset="0"/>
+                        <a:cs typeface="Calibri" charset="0"/>
+                      </a:endParaRPr>
+                    </a:p>
+                  </a:txBody>
+                  <a:tcPr marL="54864" marR="54864" marT="54864" marB="54864" anchor="ctr">
+                    <a:lnL w="9525" cap="flat" cmpd="sng" algn="ctr">
+                      <a:solidFill>
+                        <a:srgbClr val="E6DCC2"/>
+                      </a:solidFill>
+                      <a:prstDash val="solid"/>
+                      <a:round/>
+                      <a:headEnd type="none" w="med" len="med"/>
+                      <a:tailEnd type="none" w="med" len="med"/>
+                    </a:lnL>
+                    <a:lnR w="9525" cap="flat" cmpd="sng" algn="ctr">
+                      <a:solidFill>
+                        <a:srgbClr val="E6DCC2"/>
+                      </a:solidFill>
+                      <a:prstDash val="solid"/>
+                      <a:round/>
+                      <a:headEnd type="none" w="med" len="med"/>
+                      <a:tailEnd type="none" w="med" len="med"/>
+                    </a:lnR>
+                    <a:lnT w="9525" cap="flat" cmpd="sng" algn="ctr">
+                      <a:solidFill>
+                        <a:srgbClr val="E6DCC2"/>
+                      </a:solidFill>
+                      <a:prstDash val="solid"/>
+                      <a:round/>
+                      <a:headEnd type="none" w="med" len="med"/>
+                      <a:tailEnd type="none" w="med" len="med"/>
+                    </a:lnT>
+                    <a:lnB w="9525" cap="flat" cmpd="sng" algn="ctr">
+                      <a:solidFill>
+                        <a:srgbClr val="E6DCC2"/>
+                      </a:solidFill>
+                      <a:prstDash val="solid"/>
+                      <a:round/>
+                      <a:headEnd type="none" w="med" len="med"/>
+                      <a:tailEnd type="none" w="med" len="med"/>
+                    </a:lnB>
+                    <a:solidFill>
+                      <a:srgbClr val="FFFFFF"/>
+                    </a:solidFill>
+                  </a:tcPr>
+                </a:tc>
+                <a:tc>
+                  <a:txBody>
+                    <a:bodyPr/>
+                    <a:lstStyle/>
+                    <a:p>
+                      <a:pPr indent="0" marL="0">
+                        <a:buNone/>
+                      </a:pPr>
+                      <a:r>
+                        <a:rPr lang="en-US" sz="1150" dirty="0">
+                          <a:solidFill>
+                            <a:srgbClr val="3A2F1E"/>
+                          </a:solidFill>
+                          <a:latin typeface="Calibri" pitchFamily="34" charset="0"/>
+                          <a:ea typeface="Calibri" pitchFamily="34" charset="-122"/>
+                          <a:cs typeface="Calibri" pitchFamily="34" charset="-120"/>
+                        </a:rPr>
+                        <a:t>matches the labor lock</a:t>
+                      </a:r>
+                      <a:endParaRPr lang="en-US" sz="1150" dirty="0">
+                        <a:latin typeface="Calibri" charset="0"/>
+                        <a:ea typeface="Calibri" charset="0"/>
+                        <a:cs typeface="Calibri" charset="0"/>
+                      </a:endParaRPr>
+                    </a:p>
+                  </a:txBody>
+                  <a:tcPr marL="54864" marR="54864" marT="54864" marB="54864" anchor="ctr">
+                    <a:lnL w="9525" cap="flat" cmpd="sng" algn="ctr">
+                      <a:solidFill>
+                        <a:srgbClr val="E6DCC2"/>
+                      </a:solidFill>
+                      <a:prstDash val="solid"/>
+                      <a:round/>
+                      <a:headEnd type="none" w="med" len="med"/>
+                      <a:tailEnd type="none" w="med" len="med"/>
+                    </a:lnL>
+                    <a:lnR w="9525" cap="flat" cmpd="sng" algn="ctr">
+                      <a:solidFill>
+                        <a:srgbClr val="E6DCC2"/>
+                      </a:solidFill>
+                      <a:prstDash val="solid"/>
+                      <a:round/>
+                      <a:headEnd type="none" w="med" len="med"/>
+                      <a:tailEnd type="none" w="med" len="med"/>
+                    </a:lnR>
+                    <a:lnT w="9525" cap="flat" cmpd="sng" algn="ctr">
+                      <a:solidFill>
+                        <a:srgbClr val="E6DCC2"/>
+                      </a:solidFill>
+                      <a:prstDash val="solid"/>
+                      <a:round/>
+                      <a:headEnd type="none" w="med" len="med"/>
+                      <a:tailEnd type="none" w="med" len="med"/>
+                    </a:lnT>
+                    <a:lnB w="9525" cap="flat" cmpd="sng" algn="ctr">
+                      <a:solidFill>
+                        <a:srgbClr val="E6DCC2"/>
+                      </a:solidFill>
+                      <a:prstDash val="solid"/>
+                      <a:round/>
+                      <a:headEnd type="none" w="med" len="med"/>
+                      <a:tailEnd type="none" w="med" len="med"/>
+                    </a:lnB>
+                    <a:solidFill>
+                      <a:srgbClr val="FFFFFF"/>
+                    </a:solidFill>
+                  </a:tcPr>
+                </a:tc>
+              </a:tr>
             </a:tbl>
           </a:graphicData>
         </a:graphic>
@@ -5610,7 +5816,7 @@
                 <a:ea typeface="Calibri" pitchFamily="34" charset="-122"/>
                 <a:cs typeface="Calibri" pitchFamily="34" charset="-120"/>
               </a:rPr>
-              <a:t>0.1 FTE + Power BI Pro. US park: NWS weather is $0; no flight-schedule feed unless the backtest earns it</a:t>
+              <a:t>0.1 FTE + Power BI Pro. US zoo: NWS weather is $0; no flight-schedule feed unless the backtest earns it</a:t>
             </a:r>
             <a:endParaRPr lang="en-US" sz="1050" dirty="0"/>
           </a:p>
@@ -6920,7 +7126,7 @@
                 <a:ea typeface="Calibri" pitchFamily="34" charset="-122"/>
                 <a:cs typeface="Calibri" pitchFamily="34" charset="-120"/>
               </a:rPr>
-              <a:t>The dashboard exists end-to-end today: forecast vs actual, an 80% planning band, and the labor-budget panel that converts misses to dollars.</a:t>
+              <a:t>The dashboard exists end-to-end today: month-, week-, and day-ahead forecasts vs actual, an 80% planning band, and a labor-budget panel priced at the month-ahead lock.</a:t>
             </a:r>
             <a:endParaRPr lang="en-US" sz="1200" dirty="0"/>
           </a:p>
@@ -8495,7 +8701,7 @@
                 <a:ea typeface="Calibri" pitchFamily="34" charset="-122"/>
                 <a:cs typeface="Calibri" pitchFamily="34" charset="-120"/>
               </a:rPr>
-              <a:t>Regime breaks happen</a:t>
+              <a:t>Month-ahead is the hardest horizon</a:t>
             </a:r>
             <a:endParaRPr lang="en-US" sz="1450" dirty="0"/>
           </a:p>
@@ -8534,6 +8740,84 @@
                 <a:ea typeface="Calibri" pitchFamily="34" charset="-122"/>
                 <a:cs typeface="Calibri" pitchFamily="34" charset="-120"/>
               </a:rPr>
+              <a:t>No weather is knowable 30 days out, so the month-ahead model runs on calendar, seasonality, bookings, and flight schedules alone — its MAE will sit above the week-ahead model's. The 450 target is judged at this horizon because that is where labor locks.</a:t>
+            </a:r>
+            <a:endParaRPr lang="en-US" sz="1250" dirty="0"/>
+          </a:p>
+        </p:txBody>
+      </p:sp>
+      <p:sp>
+        <p:nvSpPr>
+          <p:cNvPr id="12" name="Text 10"/>
+          <p:cNvSpPr/>
+          <p:nvPr/>
+        </p:nvSpPr>
+        <p:spPr>
+          <a:xfrm>
+            <a:off x="640080" y="6172200"/>
+            <a:ext cx="3566160" cy="914400"/>
+          </a:xfrm>
+          <a:prstGeom prst="rect">
+            <a:avLst/>
+          </a:prstGeom>
+          <a:noFill/>
+          <a:ln/>
+        </p:spPr>
+        <p:txBody>
+          <a:bodyPr wrap="square" lIns="0" tIns="0" rIns="0" bIns="0" rtlCol="0" anchor="ctr"/>
+          <a:lstStyle/>
+          <a:p>
+            <a:pPr indent="0" marL="0">
+              <a:buNone/>
+            </a:pPr>
+            <a:r>
+              <a:rPr lang="en-US" sz="1450" b="1" dirty="0">
+                <a:solidFill>
+                  <a:srgbClr val="D24E1E"/>
+                </a:solidFill>
+                <a:latin typeface="Calibri" pitchFamily="34" charset="0"/>
+                <a:ea typeface="Calibri" pitchFamily="34" charset="-122"/>
+                <a:cs typeface="Calibri" pitchFamily="34" charset="-120"/>
+              </a:rPr>
+              <a:t>Regime breaks happen</a:t>
+            </a:r>
+            <a:endParaRPr lang="en-US" sz="1450" dirty="0"/>
+          </a:p>
+        </p:txBody>
+      </p:sp>
+      <p:sp>
+        <p:nvSpPr>
+          <p:cNvPr id="13" name="Text 11"/>
+          <p:cNvSpPr/>
+          <p:nvPr/>
+        </p:nvSpPr>
+        <p:spPr>
+          <a:xfrm>
+            <a:off x="4480560" y="6172200"/>
+            <a:ext cx="7040880" cy="914400"/>
+          </a:xfrm>
+          <a:prstGeom prst="rect">
+            <a:avLst/>
+          </a:prstGeom>
+          <a:noFill/>
+          <a:ln/>
+        </p:spPr>
+        <p:txBody>
+          <a:bodyPr wrap="square" lIns="0" tIns="0" rIns="0" bIns="0" rtlCol="0" anchor="ctr"/>
+          <a:lstStyle/>
+          <a:p>
+            <a:pPr indent="0" marL="0">
+              <a:buNone/>
+            </a:pPr>
+            <a:r>
+              <a:rPr lang="en-US" sz="1250" dirty="0">
+                <a:solidFill>
+                  <a:srgbClr val="3A2F1E"/>
+                </a:solidFill>
+                <a:latin typeface="Calibri" pitchFamily="34" charset="0"/>
+                <a:ea typeface="Calibri" pitchFamily="34" charset="-122"/>
+                <a:cs typeface="Calibri" pitchFamily="34" charset="-120"/>
+              </a:rPr>
               <a:t>A closure or a viral season breaks any model. Built in: drift monitoring, a same-weekday fallback that always publishes, and band logic that discards broken-regime history.</a:t>
             </a:r>
             <a:endParaRPr lang="en-US" sz="1250" dirty="0"/>
@@ -8542,7 +8826,7 @@
       </p:sp>
       <p:sp>
         <p:nvSpPr>
-          <p:cNvPr id="12" name="Text 10"/>
+          <p:cNvPr id="14" name="Text 12"/>
           <p:cNvSpPr/>
           <p:nvPr/>
         </p:nvSpPr>

--- a/docs/deck/attendance-forecast-roi.pptx
+++ b/docs/deck/attendance-forecast-roi.pptx
@@ -238,19 +238,19 @@
                   <c:v>-50</c:v>
                 </c:pt>
                 <c:pt idx="2">
-                  <c:v>-25</c:v>
+                  <c:v>-21</c:v>
                 </c:pt>
                 <c:pt idx="3">
-                  <c:v>24</c:v>
+                  <c:v>36</c:v>
                 </c:pt>
                 <c:pt idx="4">
-                  <c:v>73</c:v>
+                  <c:v>93</c:v>
                 </c:pt>
                 <c:pt idx="5">
-                  <c:v>122</c:v>
+                  <c:v>150</c:v>
                 </c:pt>
                 <c:pt idx="6">
-                  <c:v>172</c:v>
+                  <c:v>207</c:v>
                 </c:pt>
               </c:numCache>
             </c:numRef>
@@ -370,19 +370,19 @@
                   <c:v>-50</c:v>
                 </c:pt>
                 <c:pt idx="2">
-                  <c:v>-41</c:v>
+                  <c:v>-39</c:v>
                 </c:pt>
                 <c:pt idx="3">
-                  <c:v>-24</c:v>
+                  <c:v>-18</c:v>
                 </c:pt>
                 <c:pt idx="4">
-                  <c:v>-6</c:v>
+                  <c:v>3</c:v>
                 </c:pt>
                 <c:pt idx="5">
-                  <c:v>12</c:v>
+                  <c:v>24</c:v>
                 </c:pt>
                 <c:pt idx="6">
-                  <c:v>29</c:v>
+                  <c:v>45</c:v>
                 </c:pt>
               </c:numCache>
             </c:numRef>
@@ -3101,7 +3101,7 @@
                 <a:ea typeface="Cambria" pitchFamily="34" charset="-122"/>
                 <a:cs typeface="Cambria" pitchFamily="34" charset="-120"/>
               </a:rPr>
-              <a:t>Halving the miss: ~$86k–$143k a year.</a:t>
+              <a:t>Halving the miss: ~$98k–$163k a year.</a:t>
             </a:r>
             <a:endParaRPr lang="en-US" sz="3400" dirty="0"/>
           </a:p>
@@ -4456,7 +4456,7 @@
                           <a:ea typeface="Calibri" pitchFamily="34" charset="-122"/>
                           <a:cs typeface="Calibri" pitchFamily="34" charset="-120"/>
                         </a:rPr>
-                        <a:t>320</a:t>
+                        <a:t>364</a:t>
                       </a:r>
                       <a:endParaRPr lang="en-US" sz="1150" dirty="0">
                         <a:latin typeface="Calibri" charset="0"/>
@@ -4524,7 +4524,7 @@
                           <a:ea typeface="Calibri" pitchFamily="34" charset="-122"/>
                           <a:cs typeface="Calibri" pitchFamily="34" charset="-120"/>
                         </a:rPr>
-                        <a:t>our calendar</a:t>
+                        <a:t>open year-round</a:t>
                       </a:r>
                       <a:endParaRPr lang="en-US" sz="1150" dirty="0">
                         <a:latin typeface="Calibri" charset="0"/>
@@ -5259,7 +5259,7 @@
                 <a:ea typeface="Calibri" pitchFamily="34" charset="-122"/>
                 <a:cs typeface="Calibri" pitchFamily="34" charset="-120"/>
               </a:rPr>
-              <a:t>~$286k / yr</a:t>
+              <a:t>~$326k / yr</a:t>
             </a:r>
             <a:endParaRPr lang="en-US" sz="2200" dirty="0"/>
           </a:p>
@@ -5298,7 +5298,7 @@
                 <a:ea typeface="Calibri" pitchFamily="34" charset="-122"/>
                 <a:cs typeface="Calibri" pitchFamily="34" charset="-120"/>
               </a:rPr>
-              <a:t>gross misallocation removed (× 320 days)</a:t>
+              <a:t>gross misallocation removed (× 364 days)</a:t>
             </a:r>
             <a:endParaRPr lang="en-US" sz="1150" dirty="0"/>
           </a:p>
@@ -5359,7 +5359,7 @@
                 <a:ea typeface="Calibri" pitchFamily="34" charset="-122"/>
                 <a:cs typeface="Calibri" pitchFamily="34" charset="-120"/>
               </a:rPr>
-              <a:t>$86k–$143k / yr</a:t>
+              <a:t>$98k–$163k / yr</a:t>
             </a:r>
             <a:endParaRPr lang="en-US" sz="3000" dirty="0"/>
           </a:p>
@@ -5600,7 +5600,7 @@
                 <a:ea typeface="Cambria" pitchFamily="34" charset="-122"/>
                 <a:cs typeface="Cambria" pitchFamily="34" charset="-120"/>
               </a:rPr>
-              <a:t>Break-even ~month 15 in the mid case.</a:t>
+              <a:t>Break-even ~month 14 in the mid case.</a:t>
             </a:r>
             <a:endParaRPr lang="en-US" sz="3400" dirty="0"/>
           </a:p>
@@ -5877,7 +5877,7 @@
                 <a:ea typeface="Calibri" pitchFamily="34" charset="-122"/>
                 <a:cs typeface="Calibri" pitchFamily="34" charset="-120"/>
               </a:rPr>
-              <a:t>Break-even ~month 15</a:t>
+              <a:t>Break-even ~month 14</a:t>
             </a:r>
             <a:endParaRPr lang="en-US" sz="1400" dirty="0"/>
           </a:p>
@@ -5916,7 +5916,7 @@
                 <a:ea typeface="Calibri" pitchFamily="34" charset="-122"/>
                 <a:cs typeface="Calibri" pitchFamily="34" charset="-120"/>
               </a:rPr>
-              <a:t>mid case (~$114k/yr captured, net of run cost)</a:t>
+              <a:t>mid case (~$130k/yr captured, net of run cost)</a:t>
             </a:r>
             <a:endParaRPr lang="en-US" sz="1050" dirty="0"/>
           </a:p>
@@ -6016,7 +6016,7 @@
                 <a:ea typeface="Calibri" pitchFamily="34" charset="-122"/>
                 <a:cs typeface="Calibri" pitchFamily="34" charset="-120"/>
               </a:rPr>
-              <a:t>~month 26 if the model only closes a third of the gap — and if it can't beat 947 at all, Phase 0 kills it for ~$8k, not $50k</a:t>
+              <a:t>~month 23 if the model only closes a third of the gap — and if it can't beat 947 at all, Phase 0 kills it for ~$8k, not $50k</a:t>
             </a:r>
             <a:endParaRPr lang="en-US" sz="1050" dirty="0"/>
           </a:p>
@@ -8584,7 +8584,7 @@
                 <a:ea typeface="Calibri" pitchFamily="34" charset="-122"/>
                 <a:cs typeface="Calibri" pitchFamily="34" charset="-120"/>
               </a:rPr>
-              <a:t>Benefits start ~month 9; mid-case break-even lands mid-year-2. If Phase 0 says the 450 target is fantasy, we stop at the kill point having spent engineering time only.</a:t>
+              <a:t>Benefits start ~month 9; mid-case break-even lands early in year 2. If Phase 0 says the 450 target is fantasy, we stop at the kill point having spent engineering time only.</a:t>
             </a:r>
             <a:endParaRPr lang="en-US" sz="1250" dirty="0"/>
           </a:p>
